--- a/docs/582-511-web5/assets/documents/Web5_git-en-equipe.pptx
+++ b/docs/582-511-web5/assets/documents/Web5_git-en-equipe.pptx
@@ -2857,7 +2857,7 @@
                 <a:ea typeface="Poppins" pitchFamily="34" charset="-122"/>
                 <a:cs typeface="Poppins" pitchFamily="34" charset="-120"/>
               </a:rPr>
-              <a:t>Les éviter</a:t>
+              <a:t>Comment éviter les conflits</a:t>
             </a:r>
             <a:endParaRPr lang="en-US" sz="3000" dirty="0"/>
           </a:p>
@@ -2889,6 +2889,10 @@
             <a:prstDash val="solid"/>
           </a:ln>
         </p:spPr>
+        <p:txBody>
+          <a:bodyPr/>
+          <a:p/>
+        </p:txBody>
       </p:sp>
       <p:pic>
         <p:nvPicPr>
@@ -3018,6 +3022,10 @@
             <a:prstDash val="solid"/>
           </a:ln>
         </p:spPr>
+        <p:txBody>
+          <a:bodyPr/>
+          <a:p/>
+        </p:txBody>
       </p:sp>
       <p:pic>
         <p:nvPicPr>
@@ -3147,6 +3155,10 @@
             <a:prstDash val="solid"/>
           </a:ln>
         </p:spPr>
+        <p:txBody>
+          <a:bodyPr/>
+          <a:p/>
+        </p:txBody>
       </p:sp>
       <p:pic>
         <p:nvPicPr>

--- a/docs/582-511-web5/assets/documents/Web5_git-en-equipe.pptx
+++ b/docs/582-511-web5/assets/documents/Web5_git-en-equipe.pptx
@@ -2224,6 +2224,10 @@
             <a:prstDash val="solid"/>
           </a:ln>
         </p:spPr>
+        <p:txBody>
+          <a:bodyPr/>
+          <a:p/>
+        </p:txBody>
       </p:sp>
       <p:pic>
         <p:nvPicPr>
@@ -2353,6 +2357,10 @@
             <a:prstDash val="solid"/>
           </a:ln>
         </p:spPr>
+        <p:txBody>
+          <a:bodyPr/>
+          <a:p/>
+        </p:txBody>
       </p:sp>
       <p:pic>
         <p:nvPicPr>
@@ -2482,6 +2490,10 @@
             <a:prstDash val="solid"/>
           </a:ln>
         </p:spPr>
+        <p:txBody>
+          <a:bodyPr/>
+          <a:p/>
+        </p:txBody>
       </p:sp>
       <p:pic>
         <p:nvPicPr>
@@ -2611,6 +2623,10 @@
             <a:prstDash val="solid"/>
           </a:ln>
         </p:spPr>
+        <p:txBody>
+          <a:bodyPr/>
+          <a:p/>
+        </p:txBody>
       </p:sp>
       <p:pic>
         <p:nvPicPr>
@@ -2951,7 +2967,7 @@
                 <a:ea typeface="Poppins" pitchFamily="34" charset="-122"/>
                 <a:cs typeface="Poppins" pitchFamily="34" charset="-120"/>
               </a:rPr>
-              <a:t>Un fichier par zone</a:t>
+              <a:t>Un fichier par chapitre</a:t>
             </a:r>
             <a:endParaRPr lang="en-US" sz="1800" dirty="0"/>
           </a:p>
@@ -2990,7 +3006,7 @@
                 <a:ea typeface="Poppins" pitchFamily="34" charset="-122"/>
                 <a:cs typeface="Poppins" pitchFamily="34" charset="-120"/>
               </a:rPr>
-              <a:t>css/chapitre-3.css, js/chapitre-3.js pour la personne du chapitre 3</a:t>
+              <a:t>css/chapitres/ch-03.css, js/chapitres/ch-03.js pour la personne du chapitre 3</a:t>
             </a:r>
             <a:endParaRPr lang="en-US" sz="1400" dirty="0"/>
           </a:p>
@@ -3123,7 +3139,7 @@
                 <a:ea typeface="Poppins" pitchFamily="34" charset="-122"/>
                 <a:cs typeface="Poppins" pitchFamily="34" charset="-120"/>
               </a:rPr>
-              <a:t>index.html, style.css, data.json : on se prévient avant d'y toucher</a:t>
+              <a:t>index.html, commun.css, main.js, data.json : on se prévient avant d'y toucher</a:t>
             </a:r>
             <a:endParaRPr lang="en-US" sz="1400" dirty="0"/>
           </a:p>
@@ -3451,6 +3467,10 @@
             <a:prstDash val="solid"/>
           </a:ln>
         </p:spPr>
+        <p:txBody>
+          <a:bodyPr/>
+          <a:p/>
+        </p:txBody>
       </p:sp>
       <p:sp>
         <p:nvSpPr>
@@ -3747,6 +3767,10 @@
             <a:prstDash val="solid"/>
           </a:ln>
         </p:spPr>
+        <p:txBody>
+          <a:bodyPr/>
+          <a:p/>
+        </p:txBody>
       </p:sp>
       <p:sp>
         <p:nvSpPr>
@@ -3889,6 +3913,10 @@
             <a:prstDash val="solid"/>
           </a:ln>
         </p:spPr>
+        <p:txBody>
+          <a:bodyPr/>
+          <a:p/>
+        </p:txBody>
       </p:sp>
       <p:sp>
         <p:nvSpPr>
@@ -4001,7 +4029,7 @@
                 <a:ea typeface="Poppins" pitchFamily="34" charset="-122"/>
                 <a:cs typeface="Poppins" pitchFamily="34" charset="-120"/>
               </a:rPr>
-              <a:t>Ensemble, sur main, avec le squelette de data.json</a:t>
+              <a:t>Ensemble, sur main : un fichier par chapitre et le squelette de data.json</a:t>
             </a:r>
             <a:endParaRPr lang="en-US" sz="1400" dirty="0"/>
           </a:p>
@@ -4031,6 +4059,10 @@
             <a:prstDash val="solid"/>
           </a:ln>
         </p:spPr>
+        <p:txBody>
+          <a:bodyPr/>
+          <a:p/>
+        </p:txBody>
       </p:sp>
       <p:sp>
         <p:nvSpPr>
@@ -4458,6 +4490,10 @@
             <a:prstDash val="solid"/>
           </a:ln>
         </p:spPr>
+        <p:txBody>
+          <a:bodyPr/>
+          <a:p/>
+        </p:txBody>
       </p:sp>
       <p:sp>
         <p:nvSpPr>
@@ -4481,6 +4517,10 @@
             <a:prstDash val="solid"/>
           </a:ln>
         </p:spPr>
+        <p:txBody>
+          <a:bodyPr/>
+          <a:p/>
+        </p:txBody>
       </p:sp>
       <p:sp>
         <p:nvSpPr>
@@ -4504,6 +4544,10 @@
             <a:prstDash val="solid"/>
           </a:ln>
         </p:spPr>
+        <p:txBody>
+          <a:bodyPr/>
+          <a:p/>
+        </p:txBody>
       </p:sp>
       <p:sp>
         <p:nvSpPr>
@@ -4527,6 +4571,10 @@
             <a:prstDash val="solid"/>
           </a:ln>
         </p:spPr>
+        <p:txBody>
+          <a:bodyPr/>
+          <a:p/>
+        </p:txBody>
       </p:sp>
       <p:sp>
         <p:nvSpPr>
@@ -4550,6 +4598,10 @@
             <a:prstDash val="solid"/>
           </a:ln>
         </p:spPr>
+        <p:txBody>
+          <a:bodyPr/>
+          <a:p/>
+        </p:txBody>
       </p:sp>
       <p:sp>
         <p:nvSpPr>
@@ -4573,6 +4625,10 @@
             <a:prstDash val="solid"/>
           </a:ln>
         </p:spPr>
+        <p:txBody>
+          <a:bodyPr/>
+          <a:p/>
+        </p:txBody>
       </p:sp>
       <p:sp>
         <p:nvSpPr>
@@ -4596,6 +4652,10 @@
             <a:prstDash val="solid"/>
           </a:ln>
         </p:spPr>
+        <p:txBody>
+          <a:bodyPr/>
+          <a:p/>
+        </p:txBody>
       </p:sp>
       <p:sp>
         <p:nvSpPr>
@@ -4621,6 +4681,10 @@
             <a:prstDash val="solid"/>
           </a:ln>
         </p:spPr>
+        <p:txBody>
+          <a:bodyPr/>
+          <a:p/>
+        </p:txBody>
       </p:sp>
       <p:sp>
         <p:nvSpPr>
@@ -4646,6 +4710,10 @@
             <a:prstDash val="solid"/>
           </a:ln>
         </p:spPr>
+        <p:txBody>
+          <a:bodyPr/>
+          <a:p/>
+        </p:txBody>
       </p:sp>
       <p:sp>
         <p:nvSpPr>
@@ -4671,6 +4739,10 @@
             <a:prstDash val="solid"/>
           </a:ln>
         </p:spPr>
+        <p:txBody>
+          <a:bodyPr/>
+          <a:p/>
+        </p:txBody>
       </p:sp>
       <p:sp>
         <p:nvSpPr>
@@ -4696,6 +4768,10 @@
             <a:prstDash val="solid"/>
           </a:ln>
         </p:spPr>
+        <p:txBody>
+          <a:bodyPr/>
+          <a:p/>
+        </p:txBody>
       </p:sp>
       <p:sp>
         <p:nvSpPr>
@@ -4721,6 +4797,10 @@
             <a:prstDash val="solid"/>
           </a:ln>
         </p:spPr>
+        <p:txBody>
+          <a:bodyPr/>
+          <a:p/>
+        </p:txBody>
       </p:sp>
       <p:sp>
         <p:nvSpPr>
@@ -4746,6 +4826,10 @@
             <a:prstDash val="solid"/>
           </a:ln>
         </p:spPr>
+        <p:txBody>
+          <a:bodyPr/>
+          <a:p/>
+        </p:txBody>
       </p:sp>
       <p:sp>
         <p:nvSpPr>
@@ -4771,6 +4855,10 @@
             <a:prstDash val="solid"/>
           </a:ln>
         </p:spPr>
+        <p:txBody>
+          <a:bodyPr/>
+          <a:p/>
+        </p:txBody>
       </p:sp>
       <p:sp>
         <p:nvSpPr>
@@ -4796,6 +4884,10 @@
             <a:prstDash val="solid"/>
           </a:ln>
         </p:spPr>
+        <p:txBody>
+          <a:bodyPr/>
+          <a:p/>
+        </p:txBody>
       </p:sp>
       <p:sp>
         <p:nvSpPr>
@@ -4821,6 +4913,10 @@
             <a:prstDash val="solid"/>
           </a:ln>
         </p:spPr>
+        <p:txBody>
+          <a:bodyPr/>
+          <a:p/>
+        </p:txBody>
       </p:sp>
       <p:sp>
         <p:nvSpPr>
@@ -4846,6 +4942,10 @@
             <a:prstDash val="solid"/>
           </a:ln>
         </p:spPr>
+        <p:txBody>
+          <a:bodyPr/>
+          <a:p/>
+        </p:txBody>
       </p:sp>
       <p:sp>
         <p:nvSpPr>
@@ -4871,6 +4971,10 @@
             <a:prstDash val="solid"/>
           </a:ln>
         </p:spPr>
+        <p:txBody>
+          <a:bodyPr/>
+          <a:p/>
+        </p:txBody>
       </p:sp>
       <p:sp>
         <p:nvSpPr>
@@ -4896,6 +5000,10 @@
             <a:prstDash val="solid"/>
           </a:ln>
         </p:spPr>
+        <p:txBody>
+          <a:bodyPr/>
+          <a:p/>
+        </p:txBody>
       </p:sp>
       <p:sp>
         <p:nvSpPr>
@@ -4921,6 +5029,10 @@
             <a:prstDash val="solid"/>
           </a:ln>
         </p:spPr>
+        <p:txBody>
+          <a:bodyPr/>
+          <a:p/>
+        </p:txBody>
       </p:sp>
       <p:sp>
         <p:nvSpPr>
@@ -5506,6 +5618,10 @@
             <a:prstDash val="solid"/>
           </a:ln>
         </p:spPr>
+        <p:txBody>
+          <a:bodyPr/>
+          <a:p/>
+        </p:txBody>
       </p:sp>
       <p:sp>
         <p:nvSpPr>
@@ -5618,7 +5734,7 @@
                 <a:ea typeface="Poppins" pitchFamily="34" charset="-122"/>
                 <a:cs typeface="Poppins" pitchFamily="34" charset="-120"/>
               </a:rPr>
-              <a:t>Les fichiers de base, et le squelette de tous les chapitres dans data.json</a:t>
+              <a:t>Un fichier CSS et JS par chapitre, et le squelette de data.json</a:t>
             </a:r>
             <a:endParaRPr lang="en-US" sz="1400" dirty="0"/>
           </a:p>
@@ -5648,6 +5764,10 @@
             <a:prstDash val="solid"/>
           </a:ln>
         </p:spPr>
+        <p:txBody>
+          <a:bodyPr/>
+          <a:p/>
+        </p:txBody>
       </p:sp>
       <p:sp>
         <p:nvSpPr>
@@ -5790,6 +5910,10 @@
             <a:prstDash val="solid"/>
           </a:ln>
         </p:spPr>
+        <p:txBody>
+          <a:bodyPr/>
+          <a:p/>
+        </p:txBody>
       </p:sp>
       <p:sp>
         <p:nvSpPr>
@@ -5932,6 +6056,10 @@
             <a:prstDash val="solid"/>
           </a:ln>
         </p:spPr>
+        <p:txBody>
+          <a:bodyPr/>
+          <a:p/>
+        </p:txBody>
       </p:sp>
       <p:sp>
         <p:nvSpPr>
@@ -6074,6 +6202,10 @@
             <a:prstDash val="solid"/>
           </a:ln>
         </p:spPr>
+        <p:txBody>
+          <a:bodyPr/>
+          <a:p/>
+        </p:txBody>
       </p:sp>
       <p:sp>
         <p:nvSpPr>
@@ -6367,6 +6499,10 @@
             <a:prstDash val="solid"/>
           </a:ln>
         </p:spPr>
+        <p:txBody>
+          <a:bodyPr/>
+          <a:p/>
+        </p:txBody>
       </p:sp>
       <p:sp>
         <p:nvSpPr>
@@ -6487,6 +6623,10 @@
             <a:prstDash val="solid"/>
           </a:ln>
         </p:spPr>
+        <p:txBody>
+          <a:bodyPr/>
+          <a:p/>
+        </p:txBody>
       </p:sp>
       <p:sp>
         <p:nvSpPr>
@@ -6629,6 +6769,10 @@
             <a:prstDash val="solid"/>
           </a:ln>
         </p:spPr>
+        <p:txBody>
+          <a:bodyPr/>
+          <a:p/>
+        </p:txBody>
       </p:sp>
       <p:sp>
         <p:nvSpPr>
@@ -6771,6 +6915,10 @@
             <a:prstDash val="solid"/>
           </a:ln>
         </p:spPr>
+        <p:txBody>
+          <a:bodyPr/>
+          <a:p/>
+        </p:txBody>
       </p:sp>
       <p:sp>
         <p:nvSpPr>
@@ -7025,6 +7173,10 @@
             <a:prstDash val="solid"/>
           </a:ln>
         </p:spPr>
+        <p:txBody>
+          <a:bodyPr/>
+          <a:p/>
+        </p:txBody>
       </p:sp>
       <p:pic>
         <p:nvPicPr>
@@ -7154,6 +7306,10 @@
             <a:prstDash val="solid"/>
           </a:ln>
         </p:spPr>
+        <p:txBody>
+          <a:bodyPr/>
+          <a:p/>
+        </p:txBody>
       </p:sp>
       <p:pic>
         <p:nvPicPr>
@@ -7283,6 +7439,10 @@
             <a:prstDash val="solid"/>
           </a:ln>
         </p:spPr>
+        <p:txBody>
+          <a:bodyPr/>
+          <a:p/>
+        </p:txBody>
       </p:sp>
       <p:pic>
         <p:nvPicPr>
@@ -7741,6 +7901,10 @@
             <a:prstDash val="solid"/>
           </a:ln>
         </p:spPr>
+        <p:txBody>
+          <a:bodyPr/>
+          <a:p/>
+        </p:txBody>
       </p:sp>
       <p:sp>
         <p:nvSpPr>
